--- a/m7/diapositivos/sessao-10-m7-f07.pptx
+++ b/m7/diapositivos/sessao-10-m7-f07.pptx
@@ -5700,7 +5700,7 @@
                 <a:ea typeface="Arial" pitchFamily="34" charset="-122"/>
                 <a:cs typeface="Arial" pitchFamily="34" charset="-120"/>
               </a:rPr>
-              <a:t>Espreita a lição seguinte, «Da fábrica à Tabacaria»</a:t>
+              <a:t>Espreita a lição seguinte, «Da fábrica à “Tabacaria”»</a:t>
             </a:r>
             <a:endParaRPr lang="en-US" sz="2200" dirty="0"/>
           </a:p>
